--- a/presentations/observability-otel-201-python.pptx
+++ b/presentations/observability-otel-201-python.pptx
@@ -892,7 +892,7 @@
           <a:p>
             <a:r>
               <a:rPr lang="en-US" dirty="0"/>
-              <a:t>Every call to check_stock inside this loop produces its own auto-instrumented gRPC client span; the manual span wrapping all of them is one level up, representing 'get a stock answer, retrying as needed.' All four building blocks of a span are visible here: an attribute (inventory.attempts), events (one per failed attempt), and a terminal status (OK or ERROR with a recorded exception). What to show: this exact trace in Tempo if the stack is live — the retry events on a sub-timeline inside the expanded span.</a:t>
+              <a:t>This retry loop is real — it lives in order's _check_stock_with_retry — but it has no manual span today, only a log.warning per failed attempt. The point of this slide is the anatomy a span would need if one were added here, not a span that exists in the codebase right now. What to show: the real retry loop in order/src/order/main.py, and what each log.warning call would become if replaced with a span event.</a:t>
             </a:r>
             <a:endParaRPr lang="en-US" dirty="0"/>
           </a:p>
@@ -980,7 +980,7 @@
           <a:p>
             <a:r>
               <a:rPr lang="en-US" dirty="0"/>
-              <a:t>The rule of thumb: reach for trace.get_current_span() to attach a fact to the span already running, and reach for a new child span only when the thing you're describing has its own start, end, and possible failure — a retry loop does, a single computed value doesn't. With OTEL_SDK_DISABLED=true, get_current_span() returns a harmless no-op span that silently discards the attribute, so this code never needs an if-tracing-enabled guard. What to show: nothing — transition to where auto-instrumentation stops entirely.</a:t>
+              <a:t>This is the same API shape across every language this tutorial covers — the contrast earlier in this section, otel.tracer() versus a static accessor, only applies to starting a brand-new span. Enriching an existing one needs no Tracer reference at all. What to show: nothing yet — the baggage section later in this deck has the real cart.id example with its actual file paths.</a:t>
             </a:r>
             <a:endParaRPr lang="en-US" dirty="0"/>
           </a:p>
@@ -1068,7 +1068,7 @@
           <a:p>
             <a:r>
               <a:rPr lang="en-US" dirty="0"/>
-              <a:t>This is the Python track's version of chapter 17's decision framework, laid out spatially: the left panel is 'nothing to write,' the right panel is where every remaining slide in the framework and instrumentation sections of this deck lives. Notice the right panel has two different kinds of manual work in it — grpc.aio and asyncpg are one line of instrumentor registration each, while Strawberry's resolver spans and aiokafka's propagation are genuinely hand-written code. What to show: nothing yet — the next section covers each right-panel box in turn.</a:t>
+              <a:t>This is the Python track's version of chapter 17's decision framework, laid out spatially: the left panel is 'nothing to write,' the right panel is where every remaining slide in the framework and instrumentation sections of this deck lives. Notice the right panel has two different kinds of manual work in it — grpc.aio and asyncpg are one line of instrumentor registration each, while Strawberry's resolver spans and aiokafka's propagation are entirely hand-written code. What to show: nothing yet — the next section covers each right-panel box in turn.</a:t>
             </a:r>
             <a:endParaRPr lang="en-US" dirty="0"/>
           </a:p>
@@ -1332,7 +1332,7 @@
           <a:p>
             <a:r>
               <a:rPr lang="en-US" dirty="0"/>
-              <a:t>This is a manual span, not enrichment — FastAPI auto-instrumentation creates exactly one span for the HTTP request, and GraphQL hides the fact that one request can touch multiple logical operations behind that single endpoint. review.resolve_reviews, review.resolve_review, and review.add_review are each named for the resolver they wrap, nested as children under the auto-generated POST /graphql span. What to show: a trace for an addReview mutation in Tempo — one root HTTP span, one child resolver span, one asyncpg INSERT span nested under that.</a:t>
+              <a:t>This is a manual span, not enrichment — FastAPI auto-instrumentation creates exactly one span for the HTTP request, and GraphQL lets one request touch multiple logical operations behind that single endpoint, invisibly to the HTTP span. review.resolve_reviews, review.resolve_review, and review.add_review are each named for the resolver they wrap, nested as children under the auto-generated POST /graphql span. What to show: a trace for an addReview mutation in Tempo — one root HTTP span, one child resolver span, one asyncpg INSERT span nested under that.</a:t>
             </a:r>
             <a:endParaRPr lang="en-US" dirty="0"/>
           </a:p>
@@ -1596,7 +1596,7 @@
           <a:p>
             <a:r>
               <a:rPr lang="en-US" dirty="0"/>
-              <a:t>This is the cleanest contrast in the whole 201 series: identical business decision, identical metric name and status tag across all three languages, but Python's code path to Mimir has one fewer layer than either Java stack, because there was never a pre-existing Micrometer convention to preserve compatibility with. What to show: nothing yet — the actual counter and histogram code is next.</a:t>
+              <a:t>This is the cleanest contrast in the whole 201 series: identical business decision, identical metric name and status tag across all three languages, but Python's code path to Mimir has one fewer layer than either Java stack, because there was never a pre-existing Micrometer convention to preserve compatibility with. What to show: nothing yet — the actual counter code is next.</a:t>
             </a:r>
             <a:endParaRPr lang="en-US" dirty="0"/>
           </a:p>
@@ -1684,7 +1684,7 @@
           <a:p>
             <a:r>
               <a:rPr lang="en-US" dirty="0"/>
-              <a:t>Both instruments are created once at startup, next to each other, and recorded against directly with no bridge to reason about — contrast this with Spring and Quarkus's identical four-line Timer.start/sample.stop idiom, where the code looks the same across both Java stacks but what happens to that code's output on the way out differs by bridge. What to show: a Mimir query for orders_fulfillment_duration_ms_bucket if live — note Python's metric name needs no dots-to-underscores translation, because it was written in Prometheus-shaped form from the start.</a:t>
+              <a:t>This instrument is created once at startup and recorded against directly with no bridge to reason about — contrast this with Spring and Quarkus's identical meterRegistry.counter(...).increment() call, same metric name and status tag, one fewer layer underneath because there's no Micrometer bridge to translate through. What to show: a Mimir query for orders_placed_total if live — note Python's metric name needs no dots-to-underscores translation, because it was written in Prometheus-shaped form from the start.</a:t>
             </a:r>
             <a:endParaRPr lang="en-US" dirty="0"/>
           </a:p>
@@ -1772,7 +1772,7 @@
           <a:p>
             <a:r>
               <a:rPr lang="en-US" dirty="0"/>
-              <a:t>In Grafana, a histogram panel backed by orders_fulfillment_duration_ms renders small diamond markers above the buckets where exemplars were captured, and clicking one jumps directly into the matching trace in Tempo — the same payoff the 101 deck described in the abstract, now backed by Python's actual recording call. What to show: a Mimir-backed latency panel with exemplar diamonds, clicked through to a trace.</a:t>
+              <a:t>In Grafana, a panel backed by orders_placed_total renders small diamond markers above data points where exemplars were captured, and clicking one jumps directly into the matching trace in Tempo — the same payoff the 101 deck described in the abstract, now backed by Python's actual counter call. What to show: a Mimir-backed panel with exemplar diamonds, clicked through to a trace.</a:t>
             </a:r>
             <a:endParaRPr lang="en-US" dirty="0"/>
           </a:p>
@@ -2036,7 +2036,7 @@
           <a:p>
             <a:r>
               <a:rPr lang="en-US" dirty="0"/>
-              <a:t>This ordering constraint is a smaller cousin of the ENTRYPOINT ordering rule from the zero-code section: both are cases where Python's lack of a declarative, framework-managed bootstrap means the call order in a lifespan handler is load-bearing, not incidental. Every service in this tutorial calls obslog.configure() then otel.setup() in that order, in every lifespan function, for exactly this reason. What to show: nothing yet — the bug on the next slide is the real-world consequence of resource configuration, not handler ordering, going wrong.</a:t>
+              <a:t>This ordering constraint is a smaller cousin of the ENTRYPOINT ordering rule from the zero-code section: both are cases where Python's lack of a declarative, framework-managed bootstrap means the call order in a lifespan handler determines whether export works at all. Every service in this tutorial calls obslog.configure() then otel.setup() in that order, in every lifespan function, for exactly this reason. What to show: nothing yet — the bug on the next slide is the real-world consequence of resource configuration, not handler ordering, going wrong.</a:t>
             </a:r>
             <a:endParaRPr lang="en-US" dirty="0"/>
           </a:p>
@@ -2300,7 +2300,7 @@
           <a:p>
             <a:r>
               <a:rPr lang="en-US" dirty="0"/>
-              <a:t>This is the entire fix, and the generalization matters more than the specific bug: any setup wiring four exporters by hand re-creates a consistency problem that a single integrated agent solves automatically. The diagnostic habit worth taking from this — query Loki's label values for service_name and compare against Tempo's service list — catches this exact class of bug in under a minute, versus hours of assuming a signal that never exported rather than one that exported under the wrong name. What to show: curl -s -G 'http://localhost:3100/loki/api/v1/label/service_name/values' | jq . against a live stack.</a:t>
+              <a:t>This is the entire fix, and the generalization matters more than the specific bug: any setup wiring four exporters by hand re-creates a consistency problem that a single integrated agent solves automatically. Querying Loki's label values for service_name and comparing against Tempo's service list catches this exact class of bug in under a minute, versus hours of assuming a signal that never exported rather than one that exported under the wrong name. What to show: curl -s -G 'http://localhost:3100/loki/api/v1/label/service_name/values' | jq . against a live stack.</a:t>
             </a:r>
             <a:endParaRPr lang="en-US" dirty="0"/>
           </a:p>
@@ -2916,7 +2916,7 @@
           <a:p>
             <a:r>
               <a:rPr lang="en-US" dirty="0"/>
-              <a:t>Section divider. Closing section: the fourth signal, and the runtime decisions — uv, Python 3.14, UBI 10 — that make the rest of this deck's code actually run in a container. What to show: nothing yet.</a:t>
+              <a:t>Section divider. Closing section: the fourth signal, and the runtime decisions — uv, Python 3.14, UBI 10 — that make the preceding sections' code actually run in a container. What to show: nothing yet.</a:t>
             </a:r>
             <a:endParaRPr lang="en-US" dirty="0"/>
           </a:p>
@@ -5884,7 +5884,7 @@
         <p:spPr>
           <a:xfrm>
             <a:off x="566928" y="676656"/>
-            <a:ext cx="7223760" cy="1005840"/>
+            <a:ext cx="11055096" cy="1005840"/>
           </a:xfrm>
           <a:prstGeom prst="rect">
             <a:avLst/>
@@ -5922,8 +5922,8 @@
         </p:nvSpPr>
         <p:spPr>
           <a:xfrm>
-            <a:off x="7882128" y="969264"/>
-            <a:ext cx="3739896" cy="274320"/>
+            <a:off x="566928" y="1691640"/>
+            <a:ext cx="11055096" cy="4434840"/>
           </a:xfrm>
           <a:prstGeom prst="rect">
             <a:avLst/>
@@ -5932,365 +5932,199 @@
           <a:ln/>
         </p:spPr>
         <p:txBody>
-          <a:bodyPr wrap="square" rtlCol="0" anchor="ctr"/>
-          <a:lstStyle/>
-          <a:p>
-            <a:pPr algn="r" indent="0" marL="0">
-              <a:buNone/>
-            </a:pPr>
-            <a:r>
-              <a:rPr lang="en-US" sz="1100" b="1" spc="200" kern="0" dirty="0">
-                <a:solidFill>
-                  <a:srgbClr val="5A5A5A"/>
-                </a:solidFill>
-                <a:latin typeface="Red Hat Mono" pitchFamily="34" charset="0"/>
-                <a:ea typeface="Red Hat Mono" pitchFamily="34" charset="-122"/>
-                <a:cs typeface="Red Hat Mono" pitchFamily="34" charset="-120"/>
-              </a:rPr>
-              <a:t>python</a:t>
-            </a:r>
-            <a:endParaRPr lang="en-US" sz="1100" dirty="0"/>
-          </a:p>
-        </p:txBody>
-      </p:sp>
-      <p:sp>
-        <p:nvSpPr>
-          <p:cNvPr id="7" name="Shape 4"/>
-          <p:cNvSpPr/>
-          <p:nvPr/>
-        </p:nvSpPr>
-        <p:spPr>
-          <a:xfrm>
-            <a:off x="566928" y="1691640"/>
-            <a:ext cx="11055096" cy="4251960"/>
-          </a:xfrm>
-          <a:prstGeom prst="rect">
-            <a:avLst/>
-          </a:prstGeom>
-          <a:solidFill>
-            <a:srgbClr val="151515"/>
-          </a:solidFill>
-          <a:ln w="12700">
-            <a:solidFill>
-              <a:srgbClr val="151515"/>
-            </a:solidFill>
-            <a:prstDash val="solid"/>
-          </a:ln>
-        </p:spPr>
-      </p:sp>
-      <p:sp>
-        <p:nvSpPr>
-          <p:cNvPr id="8" name="Text 5"/>
-          <p:cNvSpPr/>
-          <p:nvPr/>
-        </p:nvSpPr>
-        <p:spPr>
-          <a:xfrm>
-            <a:off x="749808" y="1783080"/>
-            <a:ext cx="10689336" cy="4069080"/>
-          </a:xfrm>
-          <a:prstGeom prst="rect">
-            <a:avLst/>
-          </a:prstGeom>
-          <a:noFill/>
-          <a:ln/>
-        </p:spPr>
-        <p:txBody>
           <a:bodyPr wrap="square" rtlCol="0" anchor="t"/>
           <a:lstStyle/>
           <a:p>
-            <a:pPr algn="l" indent="0" marL="0">
-              <a:lnSpc>
-                <a:spcPct val="110000"/>
-              </a:lnSpc>
-              <a:buNone/>
-            </a:pPr>
-            <a:r>
-              <a:rPr lang="en-US" sz="1200" dirty="0">
-                <a:solidFill>
-                  <a:srgbClr val="8FB98F"/>
-                </a:solidFill>
-                <a:latin typeface="Red Hat Mono" pitchFamily="34" charset="0"/>
-                <a:ea typeface="Red Hat Mono" pitchFamily="34" charset="-122"/>
-                <a:cs typeface="Red Hat Mono" pitchFamily="34" charset="-120"/>
-              </a:rPr>
-              <a:t># services/python/order/src/order/main.py
-</a:t>
-            </a:r>
-            <a:pPr algn="l" indent="0" marL="0">
-              <a:lnSpc>
-                <a:spcPct val="110000"/>
-              </a:lnSpc>
-              <a:buNone/>
-            </a:pPr>
-            <a:r>
-              <a:rPr lang="en-US" sz="1200" dirty="0">
-                <a:solidFill>
-                  <a:srgbClr val="E6E6E6"/>
-                </a:solidFill>
-                <a:latin typeface="Red Hat Mono" pitchFamily="34" charset="0"/>
-                <a:ea typeface="Red Hat Mono" pitchFamily="34" charset="-122"/>
-                <a:cs typeface="Red Hat Mono" pitchFamily="34" charset="-120"/>
-              </a:rPr>
-              <a:t>with otel.tracer().start_as_current_span("inventory.check-with-retry") as span:
-</a:t>
-            </a:r>
-            <a:pPr algn="l" indent="0" marL="0">
-              <a:lnSpc>
-                <a:spcPct val="110000"/>
-              </a:lnSpc>
-              <a:buNone/>
-            </a:pPr>
-            <a:r>
-              <a:rPr lang="en-US" sz="1200" dirty="0">
-                <a:solidFill>
-                  <a:srgbClr val="E6E6E6"/>
-                </a:solidFill>
-                <a:latin typeface="Red Hat Mono" pitchFamily="34" charset="0"/>
-                <a:ea typeface="Red Hat Mono" pitchFamily="34" charset="-122"/>
-                <a:cs typeface="Red Hat Mono" pitchFamily="34" charset="-120"/>
-              </a:rPr>
-              <a:t>    for attempt in range(1, MAX_RETRIES + 1):
-</a:t>
-            </a:r>
-            <a:pPr algn="l" indent="0" marL="0">
-              <a:lnSpc>
-                <a:spcPct val="110000"/>
-              </a:lnSpc>
-              <a:buNone/>
-            </a:pPr>
-            <a:r>
-              <a:rPr lang="en-US" sz="1200" dirty="0">
-                <a:solidFill>
-                  <a:srgbClr val="E6E6E6"/>
-                </a:solidFill>
-                <a:latin typeface="Red Hat Mono" pitchFamily="34" charset="0"/>
-                <a:ea typeface="Red Hat Mono" pitchFamily="34" charset="-122"/>
-                <a:cs typeface="Red Hat Mono" pitchFamily="34" charset="-120"/>
-              </a:rPr>
-              <a:t>        try:
-</a:t>
-            </a:r>
-            <a:pPr algn="l" indent="0" marL="0">
-              <a:lnSpc>
-                <a:spcPct val="110000"/>
-              </a:lnSpc>
-              <a:buNone/>
-            </a:pPr>
-            <a:r>
-              <a:rPr lang="en-US" sz="1200" dirty="0">
-                <a:solidFill>
-                  <a:srgbClr val="E6E6E6"/>
-                </a:solidFill>
-                <a:latin typeface="Red Hat Mono" pitchFamily="34" charset="0"/>
-                <a:ea typeface="Red Hat Mono" pitchFamily="34" charset="-122"/>
-                <a:cs typeface="Red Hat Mono" pitchFamily="34" charset="-120"/>
-              </a:rPr>
-              <a:t>            response = await clients.check_stock(sku, quantity)
-</a:t>
-            </a:r>
-            <a:pPr algn="l" indent="0" marL="0">
-              <a:lnSpc>
-                <a:spcPct val="110000"/>
-              </a:lnSpc>
-              <a:buNone/>
-            </a:pPr>
-            <a:r>
-              <a:rPr lang="en-US" sz="1200" dirty="0">
-                <a:solidFill>
-                  <a:srgbClr val="E6E6E6"/>
-                </a:solidFill>
-                <a:latin typeface="Red Hat Mono" pitchFamily="34" charset="0"/>
-                <a:ea typeface="Red Hat Mono" pitchFamily="34" charset="-122"/>
-                <a:cs typeface="Red Hat Mono" pitchFamily="34" charset="-120"/>
-              </a:rPr>
-              <a:t>            span.set_attribute("inventory.attempts", attempt)
-</a:t>
-            </a:r>
-            <a:pPr algn="l" indent="0" marL="0">
-              <a:lnSpc>
-                <a:spcPct val="110000"/>
-              </a:lnSpc>
-              <a:buNone/>
-            </a:pPr>
-            <a:r>
-              <a:rPr lang="en-US" sz="1200" dirty="0">
-                <a:solidFill>
-                  <a:srgbClr val="E6E6E6"/>
-                </a:solidFill>
-                <a:latin typeface="Red Hat Mono" pitchFamily="34" charset="0"/>
-                <a:ea typeface="Red Hat Mono" pitchFamily="34" charset="-122"/>
-                <a:cs typeface="Red Hat Mono" pitchFamily="34" charset="-120"/>
-              </a:rPr>
-              <a:t>            span.set_status(StatusCode.OK)
-</a:t>
-            </a:r>
-            <a:pPr algn="l" indent="0" marL="0">
-              <a:lnSpc>
-                <a:spcPct val="110000"/>
-              </a:lnSpc>
-              <a:buNone/>
-            </a:pPr>
-            <a:r>
-              <a:rPr lang="en-US" sz="1200" dirty="0">
-                <a:solidFill>
-                  <a:srgbClr val="E6E6E6"/>
-                </a:solidFill>
-                <a:latin typeface="Red Hat Mono" pitchFamily="34" charset="0"/>
-                <a:ea typeface="Red Hat Mono" pitchFamily="34" charset="-122"/>
-                <a:cs typeface="Red Hat Mono" pitchFamily="34" charset="-120"/>
-              </a:rPr>
-              <a:t>            return response.available
-</a:t>
-            </a:r>
-            <a:pPr algn="l" indent="0" marL="0">
-              <a:lnSpc>
-                <a:spcPct val="110000"/>
-              </a:lnSpc>
-              <a:buNone/>
-            </a:pPr>
-            <a:r>
-              <a:rPr lang="en-US" sz="1200" dirty="0">
-                <a:solidFill>
-                  <a:srgbClr val="E6E6E6"/>
-                </a:solidFill>
-                <a:latin typeface="Red Hat Mono" pitchFamily="34" charset="0"/>
-                <a:ea typeface="Red Hat Mono" pitchFamily="34" charset="-122"/>
-                <a:cs typeface="Red Hat Mono" pitchFamily="34" charset="-120"/>
-              </a:rPr>
-              <a:t>        except Exception as exc:
-</a:t>
-            </a:r>
-            <a:pPr algn="l" indent="0" marL="0">
-              <a:lnSpc>
-                <a:spcPct val="110000"/>
-              </a:lnSpc>
-              <a:buNone/>
-            </a:pPr>
-            <a:r>
-              <a:rPr lang="en-US" sz="1200" dirty="0">
-                <a:solidFill>
-                  <a:srgbClr val="E6E6E6"/>
-                </a:solidFill>
-                <a:latin typeface="Red Hat Mono" pitchFamily="34" charset="0"/>
-                <a:ea typeface="Red Hat Mono" pitchFamily="34" charset="-122"/>
-                <a:cs typeface="Red Hat Mono" pitchFamily="34" charset="-120"/>
-              </a:rPr>
-              <a:t>            last_exc = exc
-</a:t>
-            </a:r>
-            <a:pPr algn="l" indent="0" marL="0">
-              <a:lnSpc>
-                <a:spcPct val="110000"/>
-              </a:lnSpc>
-              <a:buNone/>
-            </a:pPr>
-            <a:r>
-              <a:rPr lang="en-US" sz="1200" dirty="0">
-                <a:solidFill>
-                  <a:srgbClr val="E6E6E6"/>
-                </a:solidFill>
-                <a:latin typeface="Red Hat Mono" pitchFamily="34" charset="0"/>
-                <a:ea typeface="Red Hat Mono" pitchFamily="34" charset="-122"/>
-                <a:cs typeface="Red Hat Mono" pitchFamily="34" charset="-120"/>
-              </a:rPr>
-              <a:t>            span.add_event("attempt failed", {"attempt": attempt})
-</a:t>
-            </a:r>
-            <a:pPr algn="l" indent="0" marL="0">
-              <a:lnSpc>
-                <a:spcPct val="110000"/>
-              </a:lnSpc>
-              <a:buNone/>
-            </a:pPr>
-            <a:r>
-              <a:rPr lang="en-US" sz="1200" dirty="0">
-                <a:solidFill>
-                  <a:srgbClr val="E6E6E6"/>
-                </a:solidFill>
-                <a:latin typeface="Red Hat Mono" pitchFamily="34" charset="0"/>
-                <a:ea typeface="Red Hat Mono" pitchFamily="34" charset="-122"/>
-                <a:cs typeface="Red Hat Mono" pitchFamily="34" charset="-120"/>
-              </a:rPr>
-              <a:t>            await asyncio.sleep(RETRY_DELAY_SECONDS)
-</a:t>
-            </a:r>
-            <a:pPr algn="l" indent="0" marL="0">
-              <a:lnSpc>
-                <a:spcPct val="110000"/>
-              </a:lnSpc>
-              <a:buNone/>
-            </a:pPr>
-            <a:r>
-              <a:rPr lang="en-US" sz="1200" dirty="0">
-                <a:solidFill>
-                  <a:srgbClr val="E6E6E6"/>
-                </a:solidFill>
-                <a:latin typeface="Red Hat Mono" pitchFamily="34" charset="0"/>
-                <a:ea typeface="Red Hat Mono" pitchFamily="34" charset="-122"/>
-                <a:cs typeface="Red Hat Mono" pitchFamily="34" charset="-120"/>
-              </a:rPr>
-              <a:t>    span.record_exception(last_exc)
-</a:t>
-            </a:r>
-            <a:pPr algn="l" indent="0" marL="0">
-              <a:lnSpc>
-                <a:spcPct val="110000"/>
-              </a:lnSpc>
-              <a:buNone/>
-            </a:pPr>
-            <a:r>
-              <a:rPr lang="en-US" sz="1200" dirty="0">
-                <a:solidFill>
-                  <a:srgbClr val="E6E6E6"/>
-                </a:solidFill>
-                <a:latin typeface="Red Hat Mono" pitchFamily="34" charset="0"/>
-                <a:ea typeface="Red Hat Mono" pitchFamily="34" charset="-122"/>
-                <a:cs typeface="Red Hat Mono" pitchFamily="34" charset="-120"/>
-              </a:rPr>
-              <a:t>    span.set_status(StatusCode.ERROR, "exhausted retries")
-</a:t>
-            </a:r>
-            <a:endParaRPr lang="en-US" sz="1200" dirty="0"/>
-          </a:p>
-        </p:txBody>
-      </p:sp>
-      <p:sp>
-        <p:nvSpPr>
-          <p:cNvPr id="9" name="Text 6"/>
-          <p:cNvSpPr/>
-          <p:nvPr/>
-        </p:nvSpPr>
-        <p:spPr>
-          <a:xfrm>
-            <a:off x="566928" y="5943600"/>
-            <a:ext cx="11055096" cy="310896"/>
-          </a:xfrm>
-          <a:prstGeom prst="rect">
-            <a:avLst/>
-          </a:prstGeom>
-          <a:noFill/>
-          <a:ln/>
-        </p:spPr>
-        <p:txBody>
-          <a:bodyPr wrap="square" rtlCol="0" anchor="ctr"/>
-          <a:lstStyle/>
-          <a:p>
-            <a:pPr algn="ctr" indent="0" marL="0">
-              <a:buNone/>
-            </a:pPr>
-            <a:r>
-              <a:rPr lang="en-US" sz="1300" i="1" dirty="0">
-                <a:solidFill>
-                  <a:srgbClr val="5A5A5A"/>
+            <a:pPr algn="l" marL="342900" indent="-342900">
+              <a:lnSpc>
+                <a:spcPct val="115000"/>
+              </a:lnSpc>
+              <a:spcAft>
+                <a:spcPts val="400"/>
+              </a:spcAft>
+              <a:buSzPct val="100000"/>
+              <a:buChar char="●"/>
+            </a:pPr>
+            <a:r>
+              <a:rPr lang="en-US" sz="1700" b="1" dirty="0">
+                <a:solidFill>
+                  <a:srgbClr val="242424"/>
                 </a:solidFill>
                 <a:latin typeface="Red Hat Text" pitchFamily="34" charset="0"/>
                 <a:ea typeface="Red Hat Text" pitchFamily="34" charset="-122"/>
                 <a:cs typeface="Red Hat Text" pitchFamily="34" charset="-120"/>
               </a:rPr>
-              <a:t>Named for the business operation, not CheckStock — that name already belongs to the auto-generated gRPC client span.</a:t>
-            </a:r>
-            <a:endParaRPr lang="en-US" sz="1300" dirty="0"/>
+              <a:t>A span has four parts, set independently</a:t>
+            </a:r>
+            <a:endParaRPr lang="en-US" sz="1700" dirty="0"/>
+          </a:p>
+          <a:p>
+            <a:pPr algn="l" marL="342900" indent="-342900">
+              <a:lnSpc>
+                <a:spcPct val="115000"/>
+              </a:lnSpc>
+              <a:spcAft>
+                <a:spcPts val="600"/>
+              </a:spcAft>
+              <a:buSzPct val="100000"/>
+              <a:buChar char="●"/>
+            </a:pPr>
+            <a:r>
+              <a:rPr lang="en-US" sz="1700" dirty="0">
+                <a:solidFill>
+                  <a:srgbClr val="242424"/>
+                </a:solidFill>
+                <a:latin typeface="Red Hat Text" pitchFamily="34" charset="0"/>
+                <a:ea typeface="Red Hat Text" pitchFamily="34" charset="-122"/>
+                <a:cs typeface="Red Hat Text" pitchFamily="34" charset="-120"/>
+              </a:rPr>
+              <a:t>a name chosen for the business operation, attributes as key/value pairs, timestamped events, and a terminal status — true whether an agent or application code creates the span.</a:t>
+            </a:r>
+            <a:endParaRPr lang="en-US" sz="1700" dirty="0"/>
+          </a:p>
+          <a:p>
+            <a:pPr algn="l" marL="342900" indent="-342900">
+              <a:lnSpc>
+                <a:spcPct val="115000"/>
+              </a:lnSpc>
+              <a:spcAft>
+                <a:spcPts val="400"/>
+              </a:spcAft>
+              <a:buSzPct val="100000"/>
+              <a:buChar char="●"/>
+            </a:pPr>
+            <a:r>
+              <a:rPr lang="en-US" sz="1700" b="1" dirty="0">
+                <a:solidFill>
+                  <a:srgbClr val="242424"/>
+                </a:solidFill>
+                <a:latin typeface="Red Hat Text" pitchFamily="34" charset="0"/>
+                <a:ea typeface="Red Hat Text" pitchFamily="34" charset="-122"/>
+                <a:cs typeface="Red Hat Text" pitchFamily="34" charset="-120"/>
+              </a:rPr>
+              <a:t>_check_stock_with_retry is where a manual span would attach</a:t>
+            </a:r>
+            <a:endParaRPr lang="en-US" sz="1700" dirty="0"/>
+          </a:p>
+          <a:p>
+            <a:pPr algn="l" marL="342900" indent="-342900">
+              <a:lnSpc>
+                <a:spcPct val="115000"/>
+              </a:lnSpc>
+              <a:spcAft>
+                <a:spcPts val="600"/>
+              </a:spcAft>
+              <a:buSzPct val="100000"/>
+              <a:buChar char="●"/>
+            </a:pPr>
+            <a:r>
+              <a:rPr lang="en-US" sz="1700" dirty="0">
+                <a:solidFill>
+                  <a:srgbClr val="242424"/>
+                </a:solidFill>
+                <a:latin typeface="Red Hat Text" pitchFamily="34" charset="0"/>
+                <a:ea typeface="Red Hat Text" pitchFamily="34" charset="-122"/>
+                <a:cs typeface="Red Hat Text" pitchFamily="34" charset="-120"/>
+              </a:rPr>
+              <a:t>it wraps up to five attempts around the inventory gRPC call today with a plain try/except and a log.warning per attempt — no span of its own yet.</a:t>
+            </a:r>
+            <a:endParaRPr lang="en-US" sz="1700" dirty="0"/>
+          </a:p>
+          <a:p>
+            <a:pPr algn="l" marL="342900" indent="-342900">
+              <a:lnSpc>
+                <a:spcPct val="115000"/>
+              </a:lnSpc>
+              <a:spcAft>
+                <a:spcPts val="400"/>
+              </a:spcAft>
+              <a:buSzPct val="100000"/>
+              <a:buChar char="●"/>
+            </a:pPr>
+            <a:r>
+              <a:rPr lang="en-US" sz="1700" b="1" dirty="0">
+                <a:solidFill>
+                  <a:srgbClr val="242424"/>
+                </a:solidFill>
+                <a:latin typeface="Red Hat Text" pitchFamily="34" charset="0"/>
+                <a:ea typeface="Red Hat Text" pitchFamily="34" charset="-122"/>
+                <a:cs typeface="Red Hat Text" pitchFamily="34" charset="-120"/>
+              </a:rPr>
+              <a:t>A span added there would carry an attempt count as an attribute</a:t>
+            </a:r>
+            <a:endParaRPr lang="en-US" sz="1700" dirty="0"/>
+          </a:p>
+          <a:p>
+            <a:pPr algn="l" marL="342900" indent="-342900">
+              <a:lnSpc>
+                <a:spcPct val="115000"/>
+              </a:lnSpc>
+              <a:spcAft>
+                <a:spcPts val="600"/>
+              </a:spcAft>
+              <a:buSzPct val="100000"/>
+              <a:buChar char="●"/>
+            </a:pPr>
+            <a:r>
+              <a:rPr lang="en-US" sz="1700" dirty="0">
+                <a:solidFill>
+                  <a:srgbClr val="242424"/>
+                </a:solidFill>
+                <a:latin typeface="Red Hat Text" pitchFamily="34" charset="0"/>
+                <a:ea typeface="Red Hat Text" pitchFamily="34" charset="-122"/>
+                <a:cs typeface="Red Hat Text" pitchFamily="34" charset="-120"/>
+              </a:rPr>
+              <a:t>a failed-attempt event per retry, and an OK or ERROR status once the loop exits — the three pieces a log line alone can't group under one timeline.</a:t>
+            </a:r>
+            <a:endParaRPr lang="en-US" sz="1700" dirty="0"/>
+          </a:p>
+          <a:p>
+            <a:pPr algn="l" marL="342900" indent="-342900">
+              <a:lnSpc>
+                <a:spcPct val="115000"/>
+              </a:lnSpc>
+              <a:spcAft>
+                <a:spcPts val="400"/>
+              </a:spcAft>
+              <a:buSzPct val="100000"/>
+              <a:buChar char="●"/>
+            </a:pPr>
+            <a:r>
+              <a:rPr lang="en-US" sz="1700" b="1" dirty="0">
+                <a:solidFill>
+                  <a:srgbClr val="242424"/>
+                </a:solidFill>
+                <a:latin typeface="Red Hat Text" pitchFamily="34" charset="0"/>
+                <a:ea typeface="Red Hat Text" pitchFamily="34" charset="-122"/>
+                <a:cs typeface="Red Hat Text" pitchFamily="34" charset="-120"/>
+              </a:rPr>
+              <a:t>Naming would follow the business operation, not the protocol call</a:t>
+            </a:r>
+            <a:endParaRPr lang="en-US" sz="1700" dirty="0"/>
+          </a:p>
+          <a:p>
+            <a:pPr algn="l" marL="342900" indent="-342900">
+              <a:lnSpc>
+                <a:spcPct val="115000"/>
+              </a:lnSpc>
+              <a:spcAft>
+                <a:spcPts val="600"/>
+              </a:spcAft>
+              <a:buSzPct val="100000"/>
+              <a:buChar char="●"/>
+            </a:pPr>
+            <a:r>
+              <a:rPr lang="en-US" sz="1700" dirty="0">
+                <a:solidFill>
+                  <a:srgbClr val="242424"/>
+                </a:solidFill>
+                <a:latin typeface="Red Hat Text" pitchFamily="34" charset="0"/>
+                <a:ea typeface="Red Hat Text" pitchFamily="34" charset="-122"/>
+                <a:cs typeface="Red Hat Text" pitchFamily="34" charset="-120"/>
+              </a:rPr>
+              <a:t>check_stock already names the auto-generated gRPC client span nested inside each attempt; the wrapping span needs its own name.</a:t>
+            </a:r>
+            <a:endParaRPr lang="en-US" sz="1700" dirty="0"/>
           </a:p>
         </p:txBody>
       </p:sp>
@@ -6430,7 +6264,7 @@
         <p:spPr>
           <a:xfrm>
             <a:off x="566928" y="676656"/>
-            <a:ext cx="7223760" cy="1005840"/>
+            <a:ext cx="11055096" cy="1005840"/>
           </a:xfrm>
           <a:prstGeom prst="rect">
             <a:avLst/>
@@ -6454,7 +6288,7 @@
                 <a:ea typeface="Red Hat Display" pitchFamily="34" charset="-122"/>
                 <a:cs typeface="Red Hat Display" pitchFamily="34" charset="-120"/>
               </a:rPr>
-              <a:t>Span.current() for a fact that doesn't need its own span</a:t>
+              <a:t>Enrichment, Not a New Span</a:t>
             </a:r>
             <a:endParaRPr lang="en-US" sz="3000" dirty="0"/>
           </a:p>
@@ -6468,8 +6302,8 @@
         </p:nvSpPr>
         <p:spPr>
           <a:xfrm>
-            <a:off x="7882128" y="969264"/>
-            <a:ext cx="3739896" cy="274320"/>
+            <a:off x="566928" y="1691640"/>
+            <a:ext cx="5486400" cy="4434840"/>
           </a:xfrm>
           <a:prstGeom prst="rect">
             <a:avLst/>
@@ -6478,239 +6312,317 @@
           <a:ln/>
         </p:spPr>
         <p:txBody>
-          <a:bodyPr wrap="square" rtlCol="0" anchor="ctr"/>
-          <a:lstStyle/>
-          <a:p>
-            <a:pPr algn="r" indent="0" marL="0">
-              <a:buNone/>
-            </a:pPr>
-            <a:r>
-              <a:rPr lang="en-US" sz="1100" b="1" spc="200" kern="0" dirty="0">
-                <a:solidFill>
-                  <a:srgbClr val="5A5A5A"/>
-                </a:solidFill>
-                <a:latin typeface="Red Hat Mono" pitchFamily="34" charset="0"/>
-                <a:ea typeface="Red Hat Mono" pitchFamily="34" charset="-122"/>
-                <a:cs typeface="Red Hat Mono" pitchFamily="34" charset="-120"/>
-              </a:rPr>
-              <a:t>python</a:t>
-            </a:r>
-            <a:endParaRPr lang="en-US" sz="1100" dirty="0"/>
-          </a:p>
-        </p:txBody>
-      </p:sp>
-      <p:sp>
-        <p:nvSpPr>
-          <p:cNvPr id="7" name="Shape 4"/>
-          <p:cNvSpPr/>
-          <p:nvPr/>
-        </p:nvSpPr>
-        <p:spPr>
-          <a:xfrm>
-            <a:off x="566928" y="1691640"/>
-            <a:ext cx="11055096" cy="4251960"/>
-          </a:xfrm>
-          <a:prstGeom prst="rect">
-            <a:avLst/>
-          </a:prstGeom>
-          <a:solidFill>
-            <a:srgbClr val="151515"/>
-          </a:solidFill>
-          <a:ln w="12700">
-            <a:solidFill>
-              <a:srgbClr val="151515"/>
-            </a:solidFill>
-            <a:prstDash val="solid"/>
-          </a:ln>
-        </p:spPr>
-      </p:sp>
-      <p:sp>
-        <p:nvSpPr>
-          <p:cNvPr id="8" name="Text 5"/>
-          <p:cNvSpPr/>
-          <p:nvPr/>
-        </p:nvSpPr>
-        <p:spPr>
-          <a:xfrm>
-            <a:off x="749808" y="1783080"/>
-            <a:ext cx="10689336" cy="4069080"/>
-          </a:xfrm>
-          <a:prstGeom prst="rect">
-            <a:avLst/>
-          </a:prstGeom>
-          <a:noFill/>
-          <a:ln/>
-        </p:spPr>
-        <p:txBody>
           <a:bodyPr wrap="square" rtlCol="0" anchor="t"/>
           <a:lstStyle/>
           <a:p>
-            <a:pPr algn="l" indent="0" marL="0">
-              <a:lnSpc>
-                <a:spcPct val="110000"/>
-              </a:lnSpc>
-              <a:buNone/>
-            </a:pPr>
-            <a:r>
-              <a:rPr lang="en-US" sz="1500" dirty="0">
-                <a:solidFill>
-                  <a:srgbClr val="8FB98F"/>
-                </a:solidFill>
-                <a:latin typeface="Red Hat Mono" pitchFamily="34" charset="0"/>
-                <a:ea typeface="Red Hat Mono" pitchFamily="34" charset="-122"/>
-                <a:cs typeface="Red Hat Mono" pitchFamily="34" charset="-120"/>
-              </a:rPr>
-              <a:t># services/python/order/src/order/main.py
-</a:t>
-            </a:r>
-            <a:pPr algn="l" indent="0" marL="0">
-              <a:lnSpc>
-                <a:spcPct val="110000"/>
-              </a:lnSpc>
-              <a:buNone/>
-            </a:pPr>
-            <a:r>
-              <a:rPr lang="en-US" sz="1500" dirty="0">
-                <a:solidFill>
-                  <a:srgbClr val="E6E6E6"/>
-                </a:solidFill>
-                <a:latin typeface="Red Hat Mono" pitchFamily="34" charset="0"/>
-                <a:ea typeface="Red Hat Mono" pitchFamily="34" charset="-122"/>
-                <a:cs typeface="Red Hat Mono" pitchFamily="34" charset="-120"/>
-              </a:rPr>
-              <a:t>from opentelemetry import trace
-</a:t>
-            </a:r>
-            <a:pPr algn="l" indent="0" marL="0">
-              <a:lnSpc>
-                <a:spcPct val="110000"/>
-              </a:lnSpc>
-              <a:buNone/>
-            </a:pPr>
-            <a:r>
-              <a:rPr lang="en-US" sz="1500" dirty="0">
-                <a:solidFill>
-                  <a:srgbClr val="E6E6E6"/>
-                </a:solidFill>
-                <a:latin typeface="Red Hat Mono" pitchFamily="34" charset="0"/>
-                <a:ea typeface="Red Hat Mono" pitchFamily="34" charset="-122"/>
-                <a:cs typeface="Red Hat Mono" pitchFamily="34" charset="-120"/>
-              </a:rPr>
-              <a:t>
-</a:t>
-            </a:r>
-            <a:pPr algn="l" indent="0" marL="0">
-              <a:lnSpc>
-                <a:spcPct val="110000"/>
-              </a:lnSpc>
-              <a:buNone/>
-            </a:pPr>
-            <a:r>
-              <a:rPr lang="en-US" sz="1500" dirty="0">
-                <a:solidFill>
-                  <a:srgbClr val="E6E6E6"/>
-                </a:solidFill>
-                <a:latin typeface="Red Hat Mono" pitchFamily="34" charset="0"/>
-                <a:ea typeface="Red Hat Mono" pitchFamily="34" charset="-122"/>
-                <a:cs typeface="Red Hat Mono" pitchFamily="34" charset="-120"/>
-              </a:rPr>
-              <a:t>amount_cents = body.quantity * UNIT_PRICE_CENTS
-</a:t>
-            </a:r>
-            <a:pPr algn="l" indent="0" marL="0">
-              <a:lnSpc>
-                <a:spcPct val="110000"/>
-              </a:lnSpc>
-              <a:buNone/>
-            </a:pPr>
-            <a:r>
-              <a:rPr lang="en-US" sz="1500" dirty="0">
-                <a:solidFill>
-                  <a:srgbClr val="E6E6E6"/>
-                </a:solidFill>
-                <a:latin typeface="Red Hat Mono" pitchFamily="34" charset="0"/>
-                <a:ea typeface="Red Hat Mono" pitchFamily="34" charset="-122"/>
-                <a:cs typeface="Red Hat Mono" pitchFamily="34" charset="-120"/>
-              </a:rPr>
-              <a:t>span = trace.get_current_span()
-</a:t>
-            </a:r>
-            <a:pPr algn="l" indent="0" marL="0">
-              <a:lnSpc>
-                <a:spcPct val="110000"/>
-              </a:lnSpc>
-              <a:buNone/>
-            </a:pPr>
-            <a:r>
-              <a:rPr lang="en-US" sz="1500" dirty="0">
-                <a:solidFill>
-                  <a:srgbClr val="E6E6E6"/>
-                </a:solidFill>
-                <a:latin typeface="Red Hat Mono" pitchFamily="34" charset="0"/>
-                <a:ea typeface="Red Hat Mono" pitchFamily="34" charset="-122"/>
-                <a:cs typeface="Red Hat Mono" pitchFamily="34" charset="-120"/>
-              </a:rPr>
-              <a:t>span.set_attribute("order.amount_cents", amount_cents)
-</a:t>
-            </a:r>
-            <a:pPr algn="l" indent="0" marL="0">
-              <a:lnSpc>
-                <a:spcPct val="110000"/>
-              </a:lnSpc>
-              <a:buNone/>
-            </a:pPr>
-            <a:r>
-              <a:rPr lang="en-US" sz="1500" dirty="0">
-                <a:solidFill>
-                  <a:srgbClr val="E6E6E6"/>
-                </a:solidFill>
-                <a:latin typeface="Red Hat Mono" pitchFamily="34" charset="0"/>
-                <a:ea typeface="Red Hat Mono" pitchFamily="34" charset="-122"/>
-                <a:cs typeface="Red Hat Mono" pitchFamily="34" charset="-120"/>
-              </a:rPr>
-              <a:t>span.set_attribute("order.sku", body.sku)
-</a:t>
-            </a:r>
-            <a:endParaRPr lang="en-US" sz="1500" dirty="0"/>
-          </a:p>
-        </p:txBody>
-      </p:sp>
-      <p:sp>
-        <p:nvSpPr>
-          <p:cNvPr id="9" name="Text 6"/>
-          <p:cNvSpPr/>
-          <p:nvPr/>
-        </p:nvSpPr>
-        <p:spPr>
-          <a:xfrm>
-            <a:off x="566928" y="5943600"/>
-            <a:ext cx="11055096" cy="310896"/>
-          </a:xfrm>
-          <a:prstGeom prst="rect">
-            <a:avLst/>
-          </a:prstGeom>
-          <a:noFill/>
-          <a:ln/>
-        </p:spPr>
-        <p:txBody>
-          <a:bodyPr wrap="square" rtlCol="0" anchor="ctr"/>
-          <a:lstStyle/>
-          <a:p>
-            <a:pPr algn="ctr" indent="0" marL="0">
-              <a:buNone/>
-            </a:pPr>
-            <a:r>
-              <a:rPr lang="en-US" sz="1300" i="1" dirty="0">
-                <a:solidFill>
-                  <a:srgbClr val="5A5A5A"/>
+            <a:pPr algn="l" marL="342900" indent="-342900">
+              <a:lnSpc>
+                <a:spcPct val="120000"/>
+              </a:lnSpc>
+              <a:spcAft>
+                <a:spcPts val="800"/>
+              </a:spcAft>
+              <a:buSzPct val="100000"/>
+              <a:buChar char="●"/>
+            </a:pPr>
+            <a:r>
+              <a:rPr lang="en-US" sz="1700" b="1" dirty="0">
+                <a:solidFill>
+                  <a:srgbClr val="242424"/>
                 </a:solidFill>
                 <a:latin typeface="Red Hat Text" pitchFamily="34" charset="0"/>
                 <a:ea typeface="Red Hat Text" pitchFamily="34" charset="-122"/>
                 <a:cs typeface="Red Hat Text" pitchFamily="34" charset="-120"/>
               </a:rPr>
-              <a:t>No Tracer needed, no lifecycle to manage — this attaches to the auto-generated POST /orders span already active.</a:t>
-            </a:r>
-            <a:endParaRPr lang="en-US" sz="1300" dirty="0"/>
+              <a:t>A new child span</a:t>
+            </a:r>
+            <a:endParaRPr lang="en-US" sz="1700" dirty="0"/>
+          </a:p>
+          <a:p>
+            <a:pPr algn="l" marL="342900" indent="-342900">
+              <a:lnSpc>
+                <a:spcPct val="120000"/>
+              </a:lnSpc>
+              <a:spcAft>
+                <a:spcPts val="800"/>
+              </a:spcAft>
+              <a:buSzPct val="100000"/>
+              <a:buChar char="●"/>
+            </a:pPr>
+            <a:r>
+              <a:rPr lang="en-US" sz="1700" dirty="0">
+                <a:solidFill>
+                  <a:srgbClr val="242424"/>
+                </a:solidFill>
+                <a:latin typeface="Red Hat Text" pitchFamily="34" charset="0"/>
+                <a:ea typeface="Red Hat Text" pitchFamily="34" charset="-122"/>
+                <a:cs typeface="Red Hat Text" pitchFamily="34" charset="-120"/>
+              </a:rPr>
+              <a:t>is the right tool when the thing being described has its own start, its own end, and its own possible failure — a retry loop, a resolver call with a real cost.</a:t>
+            </a:r>
+            <a:endParaRPr lang="en-US" sz="1700" dirty="0"/>
+          </a:p>
+          <a:p>
+            <a:pPr algn="l" marL="342900" indent="-342900">
+              <a:lnSpc>
+                <a:spcPct val="120000"/>
+              </a:lnSpc>
+              <a:spcAft>
+                <a:spcPts val="800"/>
+              </a:spcAft>
+              <a:buSzPct val="100000"/>
+              <a:buChar char="●"/>
+            </a:pPr>
+            <a:r>
+              <a:rPr lang="en-US" sz="1700" b="1" dirty="0">
+                <a:solidFill>
+                  <a:srgbClr val="242424"/>
+                </a:solidFill>
+                <a:latin typeface="Red Hat Text" pitchFamily="34" charset="0"/>
+                <a:ea typeface="Red Hat Text" pitchFamily="34" charset="-122"/>
+                <a:cs typeface="Red Hat Text" pitchFamily="34" charset="-120"/>
+              </a:rPr>
+              <a:t>trace.get_current_span()</a:t>
+            </a:r>
+            <a:endParaRPr lang="en-US" sz="1700" dirty="0"/>
+          </a:p>
+          <a:p>
+            <a:pPr algn="l" marL="342900" indent="-342900">
+              <a:lnSpc>
+                <a:spcPct val="120000"/>
+              </a:lnSpc>
+              <a:spcAft>
+                <a:spcPts val="800"/>
+              </a:spcAft>
+              <a:buSzPct val="100000"/>
+              <a:buChar char="●"/>
+            </a:pPr>
+            <a:r>
+              <a:rPr lang="en-US" sz="1700" dirty="0">
+                <a:solidFill>
+                  <a:srgbClr val="242424"/>
+                </a:solidFill>
+                <a:latin typeface="Red Hat Text" pitchFamily="34" charset="0"/>
+                <a:ea typeface="Red Hat Text" pitchFamily="34" charset="-122"/>
+                <a:cs typeface="Red Hat Text" pitchFamily="34" charset="-120"/>
+              </a:rPr>
+              <a:t>returns whatever span is active on the current context — the auto-generated FastAPI or gRPC server span, if no manual child span has started yet.</a:t>
+            </a:r>
+            <a:endParaRPr lang="en-US" sz="1700" dirty="0"/>
+          </a:p>
+          <a:p>
+            <a:pPr algn="l" marL="342900" indent="-342900">
+              <a:lnSpc>
+                <a:spcPct val="120000"/>
+              </a:lnSpc>
+              <a:spcAft>
+                <a:spcPts val="800"/>
+              </a:spcAft>
+              <a:buSzPct val="100000"/>
+              <a:buChar char="●"/>
+            </a:pPr>
+            <a:r>
+              <a:rPr lang="en-US" sz="1700" b="1" dirty="0">
+                <a:solidFill>
+                  <a:srgbClr val="242424"/>
+                </a:solidFill>
+                <a:latin typeface="Red Hat Text" pitchFamily="34" charset="0"/>
+                <a:ea typeface="Red Hat Text" pitchFamily="34" charset="-122"/>
+                <a:cs typeface="Red Hat Text" pitchFamily="34" charset="-120"/>
+              </a:rPr>
+              <a:t>No Tracer call needed for this</a:t>
+            </a:r>
+            <a:endParaRPr lang="en-US" sz="1700" dirty="0"/>
+          </a:p>
+          <a:p>
+            <a:pPr algn="l" marL="342900" indent="-342900">
+              <a:lnSpc>
+                <a:spcPct val="120000"/>
+              </a:lnSpc>
+              <a:spcAft>
+                <a:spcPts val="800"/>
+              </a:spcAft>
+              <a:buSzPct val="100000"/>
+              <a:buChar char="●"/>
+            </a:pPr>
+            <a:r>
+              <a:rPr lang="en-US" sz="1700" dirty="0">
+                <a:solidFill>
+                  <a:srgbClr val="242424"/>
+                </a:solidFill>
+                <a:latin typeface="Red Hat Text" pitchFamily="34" charset="0"/>
+                <a:ea typeface="Red Hat Text" pitchFamily="34" charset="-122"/>
+                <a:cs typeface="Red Hat Text" pitchFamily="34" charset="-120"/>
+              </a:rPr>
+              <a:t>there is nothing to start and nothing to end, because the span being enriched isn't owned by this code at all.</a:t>
+            </a:r>
+            <a:endParaRPr lang="en-US" sz="1700" dirty="0"/>
+          </a:p>
+        </p:txBody>
+      </p:sp>
+      <p:sp>
+        <p:nvSpPr>
+          <p:cNvPr id="7" name="Text 4"/>
+          <p:cNvSpPr/>
+          <p:nvPr/>
+        </p:nvSpPr>
+        <p:spPr>
+          <a:xfrm>
+            <a:off x="6419088" y="1691640"/>
+            <a:ext cx="5486400" cy="4434840"/>
+          </a:xfrm>
+          <a:prstGeom prst="rect">
+            <a:avLst/>
+          </a:prstGeom>
+          <a:noFill/>
+          <a:ln/>
+        </p:spPr>
+        <p:txBody>
+          <a:bodyPr wrap="square" rtlCol="0" anchor="t"/>
+          <a:lstStyle/>
+          <a:p>
+            <a:pPr algn="l" marL="342900" indent="-342900">
+              <a:lnSpc>
+                <a:spcPct val="120000"/>
+              </a:lnSpc>
+              <a:spcAft>
+                <a:spcPts val="800"/>
+              </a:spcAft>
+              <a:buSzPct val="100000"/>
+              <a:buChar char="●"/>
+            </a:pPr>
+            <a:r>
+              <a:rPr lang="en-US" sz="1700" b="1" dirty="0">
+                <a:solidFill>
+                  <a:srgbClr val="242424"/>
+                </a:solidFill>
+                <a:latin typeface="Red Hat Text" pitchFamily="34" charset="0"/>
+                <a:ea typeface="Red Hat Text" pitchFamily="34" charset="-122"/>
+                <a:cs typeface="Red Hat Text" pitchFamily="34" charset="-120"/>
+              </a:rPr>
+              <a:t>The one real example in this codebase</a:t>
+            </a:r>
+            <a:endParaRPr lang="en-US" sz="1700" dirty="0"/>
+          </a:p>
+          <a:p>
+            <a:pPr algn="l" marL="342900" indent="-342900">
+              <a:lnSpc>
+                <a:spcPct val="120000"/>
+              </a:lnSpc>
+              <a:spcAft>
+                <a:spcPts val="800"/>
+              </a:spcAft>
+              <a:buSzPct val="100000"/>
+              <a:buChar char="●"/>
+            </a:pPr>
+            <a:r>
+              <a:rPr lang="en-US" sz="1700" dirty="0">
+                <a:solidFill>
+                  <a:srgbClr val="242424"/>
+                </a:solidFill>
+                <a:latin typeface="Red Hat Text" pitchFamily="34" charset="0"/>
+                <a:ea typeface="Red Hat Text" pitchFamily="34" charset="-122"/>
+                <a:cs typeface="Red Hat Text" pitchFamily="34" charset="-120"/>
+              </a:rPr>
+              <a:t>is cart.id: the order service sets it as baggage, and inventory and payment read it back and attach it to their own incoming spans — covered later in this section.</a:t>
+            </a:r>
+            <a:endParaRPr lang="en-US" sz="1700" dirty="0"/>
+          </a:p>
+          <a:p>
+            <a:pPr algn="l" marL="342900" indent="-342900">
+              <a:lnSpc>
+                <a:spcPct val="120000"/>
+              </a:lnSpc>
+              <a:spcAft>
+                <a:spcPts val="800"/>
+              </a:spcAft>
+              <a:buSzPct val="100000"/>
+              <a:buChar char="●"/>
+            </a:pPr>
+            <a:r>
+              <a:rPr lang="en-US" sz="1700" b="1" dirty="0">
+                <a:solidFill>
+                  <a:srgbClr val="242424"/>
+                </a:solidFill>
+                <a:latin typeface="Red Hat Text" pitchFamily="34" charset="0"/>
+                <a:ea typeface="Red Hat Text" pitchFamily="34" charset="-122"/>
+                <a:cs typeface="Red Hat Text" pitchFamily="34" charset="-120"/>
+              </a:rPr>
+              <a:t>With tracing disabled</a:t>
+            </a:r>
+            <a:endParaRPr lang="en-US" sz="1700" dirty="0"/>
+          </a:p>
+          <a:p>
+            <a:pPr algn="l" marL="342900" indent="-342900">
+              <a:lnSpc>
+                <a:spcPct val="120000"/>
+              </a:lnSpc>
+              <a:spcAft>
+                <a:spcPts val="800"/>
+              </a:spcAft>
+              <a:buSzPct val="100000"/>
+              <a:buChar char="●"/>
+            </a:pPr>
+            <a:r>
+              <a:rPr lang="en-US" sz="1700" dirty="0">
+                <a:solidFill>
+                  <a:srgbClr val="242424"/>
+                </a:solidFill>
+                <a:latin typeface="Red Hat Text" pitchFamily="34" charset="0"/>
+                <a:ea typeface="Red Hat Text" pitchFamily="34" charset="-122"/>
+                <a:cs typeface="Red Hat Text" pitchFamily="34" charset="-120"/>
+              </a:rPr>
+              <a:t>OTEL_SDK_DISABLED=true, get_current_span() returns a harmless no-op span that silently discards the attribute — no if-tracing-enabled guard needed.</a:t>
+            </a:r>
+            <a:endParaRPr lang="en-US" sz="1700" dirty="0"/>
+          </a:p>
+          <a:p>
+            <a:pPr algn="l" marL="342900" indent="-342900">
+              <a:lnSpc>
+                <a:spcPct val="120000"/>
+              </a:lnSpc>
+              <a:spcAft>
+                <a:spcPts val="800"/>
+              </a:spcAft>
+              <a:buSzPct val="100000"/>
+              <a:buChar char="●"/>
+            </a:pPr>
+            <a:r>
+              <a:rPr lang="en-US" sz="1700" b="1" dirty="0">
+                <a:solidFill>
+                  <a:srgbClr val="242424"/>
+                </a:solidFill>
+                <a:latin typeface="Red Hat Text" pitchFamily="34" charset="0"/>
+                <a:ea typeface="Red Hat Text" pitchFamily="34" charset="-122"/>
+                <a:cs typeface="Red Hat Text" pitchFamily="34" charset="-120"/>
+              </a:rPr>
+              <a:t>The rule of thumb</a:t>
+            </a:r>
+            <a:endParaRPr lang="en-US" sz="1700" dirty="0"/>
+          </a:p>
+          <a:p>
+            <a:pPr algn="l" marL="342900" indent="-342900">
+              <a:lnSpc>
+                <a:spcPct val="120000"/>
+              </a:lnSpc>
+              <a:spcAft>
+                <a:spcPts val="800"/>
+              </a:spcAft>
+              <a:buSzPct val="100000"/>
+              <a:buChar char="●"/>
+            </a:pPr>
+            <a:r>
+              <a:rPr lang="en-US" sz="1700" dirty="0">
+                <a:solidFill>
+                  <a:srgbClr val="242424"/>
+                </a:solidFill>
+                <a:latin typeface="Red Hat Text" pitchFamily="34" charset="0"/>
+                <a:ea typeface="Red Hat Text" pitchFamily="34" charset="-122"/>
+                <a:cs typeface="Red Hat Text" pitchFamily="34" charset="-120"/>
+              </a:rPr>
+              <a:t>reach for a new child span only when the operation has its own lifecycle; reach for get_current_span() to attach a fact to the one already in flight.</a:t>
+            </a:r>
+            <a:endParaRPr lang="en-US" sz="1700" dirty="0"/>
           </a:p>
         </p:txBody>
       </p:sp>
@@ -9343,7 +9255,7 @@
                 <a:ea typeface="Red Hat Display" pitchFamily="34" charset="-122"/>
                 <a:cs typeface="Red Hat Display" pitchFamily="34" charset="-120"/>
               </a:rPr>
-              <a:t>METRICS · COUNTER AND HISTOGRAM</a:t>
+              <a:t>METRICS · THE REAL COUNTER</a:t>
             </a:r>
             <a:endParaRPr lang="en-US" sz="1200" dirty="0"/>
           </a:p>
@@ -9382,7 +9294,7 @@
                 <a:ea typeface="Red Hat Display" pitchFamily="34" charset="-122"/>
                 <a:cs typeface="Red Hat Display" pitchFamily="34" charset="-120"/>
               </a:rPr>
-              <a:t>orders_placed_total and the fulfillment-duration histogram</a:t>
+              <a:t>orders_placed_total, created once and incremented per request</a:t>
             </a:r>
             <a:endParaRPr lang="en-US" sz="3000" dirty="0"/>
           </a:p>
@@ -9480,7 +9392,7 @@
               <a:buNone/>
             </a:pPr>
             <a:r>
-              <a:rPr lang="en-US" sz="1300" dirty="0">
+              <a:rPr lang="en-US" sz="1400" dirty="0">
                 <a:solidFill>
                   <a:srgbClr val="8FB98F"/>
                 </a:solidFill>
@@ -9488,7 +9400,7 @@
                 <a:ea typeface="Red Hat Mono" pitchFamily="34" charset="-122"/>
                 <a:cs typeface="Red Hat Mono" pitchFamily="34" charset="-120"/>
               </a:rPr>
-              <a:t># services/python/order/src/order/main.py — created once at startup
+              <a:t># services/python/order/src/order/main.py
 </a:t>
             </a:r>
             <a:pPr algn="l" indent="0" marL="0">
@@ -9498,7 +9410,7 @@
               <a:buNone/>
             </a:pPr>
             <a:r>
-              <a:rPr lang="en-US" sz="1300" dirty="0">
+              <a:rPr lang="en-US" sz="1400" dirty="0">
                 <a:solidFill>
                   <a:srgbClr val="E6E6E6"/>
                 </a:solidFill>
@@ -9516,7 +9428,7 @@
               <a:buNone/>
             </a:pPr>
             <a:r>
-              <a:rPr lang="en-US" sz="1300" dirty="0">
+              <a:rPr lang="en-US" sz="1400" dirty="0">
                 <a:solidFill>
                   <a:srgbClr val="E6E6E6"/>
                 </a:solidFill>
@@ -9534,7 +9446,7 @@
               <a:buNone/>
             </a:pPr>
             <a:r>
-              <a:rPr lang="en-US" sz="1300" dirty="0">
+              <a:rPr lang="en-US" sz="1400" dirty="0">
                 <a:solidFill>
                   <a:srgbClr val="E6E6E6"/>
                 </a:solidFill>
@@ -9552,7 +9464,7 @@
               <a:buNone/>
             </a:pPr>
             <a:r>
-              <a:rPr lang="en-US" sz="1300" dirty="0">
+              <a:rPr lang="en-US" sz="1400" dirty="0">
                 <a:solidFill>
                   <a:srgbClr val="E6E6E6"/>
                 </a:solidFill>
@@ -9560,7 +9472,7 @@
                 <a:ea typeface="Red Hat Mono" pitchFamily="34" charset="-122"/>
                 <a:cs typeface="Red Hat Mono" pitchFamily="34" charset="-120"/>
               </a:rPr>
-              <a:t>app.state.fulfillment_histogram = otel.meter().create_histogram(
+              <a:t>
 </a:t>
             </a:r>
             <a:pPr algn="l" indent="0" marL="0">
@@ -9570,15 +9482,15 @@
               <a:buNone/>
             </a:pPr>
             <a:r>
-              <a:rPr lang="en-US" sz="1300" dirty="0">
-                <a:solidFill>
-                  <a:srgbClr val="E6E6E6"/>
+              <a:rPr lang="en-US" sz="1400" dirty="0">
+                <a:solidFill>
+                  <a:srgbClr val="8FB98F"/>
                 </a:solidFill>
                 <a:latin typeface="Red Hat Mono" pitchFamily="34" charset="0"/>
                 <a:ea typeface="Red Hat Mono" pitchFamily="34" charset="-122"/>
                 <a:cs typeface="Red Hat Mono" pitchFamily="34" charset="-120"/>
               </a:rPr>
-              <a:t>    "orders_fulfillment_duration_ms", unit="ms",
+              <a:t># ...incremented per request in the handler:
 </a:t>
             </a:r>
             <a:pPr algn="l" indent="0" marL="0">
@@ -9588,7 +9500,7 @@
               <a:buNone/>
             </a:pPr>
             <a:r>
-              <a:rPr lang="en-US" sz="1300" dirty="0">
+              <a:rPr lang="en-US" sz="1400" dirty="0">
                 <a:solidFill>
                   <a:srgbClr val="E6E6E6"/>
                 </a:solidFill>
@@ -9596,100 +9508,10 @@
                 <a:ea typeface="Red Hat Mono" pitchFamily="34" charset="-122"/>
                 <a:cs typeface="Red Hat Mono" pitchFamily="34" charset="-120"/>
               </a:rPr>
-              <a:t>    description="Time to fulfill an order, from inventory check to Kafka publish",
-</a:t>
-            </a:r>
-            <a:pPr algn="l" indent="0" marL="0">
-              <a:lnSpc>
-                <a:spcPct val="110000"/>
-              </a:lnSpc>
-              <a:buNone/>
-            </a:pPr>
-            <a:r>
-              <a:rPr lang="en-US" sz="1300" dirty="0">
-                <a:solidFill>
-                  <a:srgbClr val="E6E6E6"/>
-                </a:solidFill>
-                <a:latin typeface="Red Hat Mono" pitchFamily="34" charset="0"/>
-                <a:ea typeface="Red Hat Mono" pitchFamily="34" charset="-122"/>
-                <a:cs typeface="Red Hat Mono" pitchFamily="34" charset="-120"/>
-              </a:rPr>
-              <a:t>)
-</a:t>
-            </a:r>
-            <a:pPr algn="l" indent="0" marL="0">
-              <a:lnSpc>
-                <a:spcPct val="110000"/>
-              </a:lnSpc>
-              <a:buNone/>
-            </a:pPr>
-            <a:r>
-              <a:rPr lang="en-US" sz="1300" dirty="0">
-                <a:solidFill>
-                  <a:srgbClr val="E6E6E6"/>
-                </a:solidFill>
-                <a:latin typeface="Red Hat Mono" pitchFamily="34" charset="0"/>
-                <a:ea typeface="Red Hat Mono" pitchFamily="34" charset="-122"/>
-                <a:cs typeface="Red Hat Mono" pitchFamily="34" charset="-120"/>
-              </a:rPr>
-              <a:t>
-</a:t>
-            </a:r>
-            <a:pPr algn="l" indent="0" marL="0">
-              <a:lnSpc>
-                <a:spcPct val="110000"/>
-              </a:lnSpc>
-              <a:buNone/>
-            </a:pPr>
-            <a:r>
-              <a:rPr lang="en-US" sz="1300" dirty="0">
-                <a:solidFill>
-                  <a:srgbClr val="8FB98F"/>
-                </a:solidFill>
-                <a:latin typeface="Red Hat Mono" pitchFamily="34" charset="0"/>
-                <a:ea typeface="Red Hat Mono" pitchFamily="34" charset="-122"/>
-                <a:cs typeface="Red Hat Mono" pitchFamily="34" charset="-120"/>
-              </a:rPr>
-              <a:t># ...incremented/recorded per request in the handler:
-</a:t>
-            </a:r>
-            <a:pPr algn="l" indent="0" marL="0">
-              <a:lnSpc>
-                <a:spcPct val="110000"/>
-              </a:lnSpc>
-              <a:buNone/>
-            </a:pPr>
-            <a:r>
-              <a:rPr lang="en-US" sz="1300" dirty="0">
-                <a:solidFill>
-                  <a:srgbClr val="E6E6E6"/>
-                </a:solidFill>
-                <a:latin typeface="Red Hat Mono" pitchFamily="34" charset="0"/>
-                <a:ea typeface="Red Hat Mono" pitchFamily="34" charset="-122"/>
-                <a:cs typeface="Red Hat Mono" pitchFamily="34" charset="-120"/>
-              </a:rPr>
-              <a:t>app.state.fulfillment_histogram.record(duration_ms, {"status": status})
-</a:t>
-            </a:r>
-            <a:pPr algn="l" indent="0" marL="0">
-              <a:lnSpc>
-                <a:spcPct val="110000"/>
-              </a:lnSpc>
-              <a:buNone/>
-            </a:pPr>
-            <a:r>
-              <a:rPr lang="en-US" sz="1300" dirty="0">
-                <a:solidFill>
-                  <a:srgbClr val="E6E6E6"/>
-                </a:solidFill>
-                <a:latin typeface="Red Hat Mono" pitchFamily="34" charset="0"/>
-                <a:ea typeface="Red Hat Mono" pitchFamily="34" charset="-122"/>
-                <a:cs typeface="Red Hat Mono" pitchFamily="34" charset="-120"/>
-              </a:rPr>
               <a:t>app.state.orders_counter.add(1, {"status": status})
 </a:t>
             </a:r>
-            <a:endParaRPr lang="en-US" sz="1300" dirty="0"/>
+            <a:endParaRPr lang="en-US" sz="1400" dirty="0"/>
           </a:p>
         </p:txBody>
       </p:sp>
@@ -9892,7 +9714,7 @@
                 <a:ea typeface="Red Hat Display" pitchFamily="34" charset="-122"/>
                 <a:cs typeface="Red Hat Display" pitchFamily="34" charset="-120"/>
               </a:rPr>
-              <a:t>A histogram bucket that remembers a trace ID</a:t>
+              <a:t>A sample point that remembers a trace ID</a:t>
             </a:r>
             <a:endParaRPr lang="en-US" sz="3000" dirty="0"/>
           </a:p>
@@ -9962,7 +9784,7 @@
                 <a:ea typeface="Red Hat Text" pitchFamily="34" charset="-122"/>
                 <a:cs typeface="Red Hat Text" pitchFamily="34" charset="-120"/>
               </a:rPr>
-              <a:t>set in the Containerfile, tells the SDK to attach an exemplar whenever a sampled trace is active at recording time — no extra code at the call site.</a:t>
+              <a:t>set in the Containerfile, tells the SDK to attach an exemplar to a measurement whenever a sampled trace is active at record time — no extra code at the call site.</a:t>
             </a:r>
             <a:endParaRPr lang="en-US" sz="1700" dirty="0"/>
           </a:p>
@@ -9986,7 +9808,7 @@
                 <a:ea typeface="Red Hat Text" pitchFamily="34" charset="-122"/>
                 <a:cs typeface="Red Hat Text" pitchFamily="34" charset="-120"/>
               </a:rPr>
-              <a:t>fulfillment_histogram.record(...) executes inside the active span</a:t>
+              <a:t>orders_counter.add(...) executes inside the active span</a:t>
             </a:r>
             <a:endParaRPr lang="en-US" sz="1700" dirty="0"/>
           </a:p>
@@ -10010,7 +9832,7 @@
                 <a:ea typeface="Red Hat Text" pitchFamily="34" charset="-122"/>
                 <a:cs typeface="Red Hat Text" pitchFamily="34" charset="-120"/>
               </a:rPr>
-              <a:t>the auto-generated POST /orders root span, and possibly a manual child span too — so every measurement has a live trace context to attach.</a:t>
+              <a:t>the auto-generated POST /orders root span, so every increment has a live trace context to attach.</a:t>
             </a:r>
             <a:endParaRPr lang="en-US" sz="1700" dirty="0"/>
           </a:p>
@@ -10034,7 +9856,7 @@
                 <a:ea typeface="Red Hat Text" pitchFamily="34" charset="-122"/>
                 <a:cs typeface="Red Hat Text" pitchFamily="34" charset="-120"/>
               </a:rPr>
-              <a:t>The exemplar is one sample, not an aggregate</a:t>
+              <a:t>Exemplars generally attach to histogram buckets</a:t>
             </a:r>
             <a:endParaRPr lang="en-US" sz="1700" dirty="0"/>
           </a:p>
@@ -10058,7 +9880,7 @@
                 <a:ea typeface="Red Hat Text" pitchFamily="34" charset="-122"/>
                 <a:cs typeface="Red Hat Text" pitchFamily="34" charset="-120"/>
               </a:rPr>
-              <a:t>chosen by the SDK's exemplar reservoir to be representative of what landed in that specific bucket.</a:t>
+              <a:t>a counter like this one carries a single exemplar per data point instead, but the SDK attaches it the same way.</a:t>
             </a:r>
             <a:endParaRPr lang="en-US" sz="1700" dirty="0"/>
           </a:p>
@@ -10082,7 +9904,7 @@
                 <a:ea typeface="Red Hat Text" pitchFamily="34" charset="-122"/>
                 <a:cs typeface="Red Hat Text" pitchFamily="34" charset="-120"/>
               </a:rPr>
-              <a:t>If a trace is dropped before export, the measurement still counts</a:t>
+              <a:t>Checking the counter before trusting the pipeline</a:t>
             </a:r>
             <a:endParaRPr lang="en-US" sz="1700" dirty="0"/>
           </a:p>
@@ -10106,7 +9928,7 @@
                 <a:ea typeface="Red Hat Text" pitchFamily="34" charset="-122"/>
                 <a:cs typeface="Red Hat Text" pitchFamily="34" charset="-120"/>
               </a:rPr>
-              <a:t>the histogram's count and sum are unaffected — only the exemplar pointer is missing for that one data point.</a:t>
+              <a:t>query Mimir for orders_placed_total directly to rule out a handler that never ran, before assuming the exemplar wiring is at fault.</a:t>
             </a:r>
             <a:endParaRPr lang="en-US" sz="1700" dirty="0"/>
           </a:p>
@@ -12430,7 +12252,7 @@
                 <a:ea typeface="Red Hat Text" pitchFamily="34" charset="-122"/>
                 <a:cs typeface="Red Hat Text" pitchFamily="34" charset="-120"/>
               </a:rPr>
-              <a:t>cart.id rides for free over gRPC. Over Kafka, nothing rides for free.</a:t>
+              <a:t>cart.id propagates automatically over gRPC. Over Kafka, it needs explicit code.</a:t>
             </a:r>
             <a:endParaRPr lang="en-US" sz="1600" dirty="0"/>
           </a:p>
@@ -13571,7 +13393,7 @@
                 <a:ea typeface="Red Hat Text" pitchFamily="34" charset="-122"/>
                 <a:cs typeface="Red Hat Text" pitchFamily="34" charset="-120"/>
               </a:rPr>
-              <a:t>Both Java stacks get this hop for free</a:t>
+              <a:t>Both Java stacks get this hop with no extra code</a:t>
             </a:r>
             <a:endParaRPr lang="en-US" sz="1700" dirty="0"/>
           </a:p>
@@ -13761,7 +13583,7 @@
                 <a:ea typeface="Red Hat Display" pitchFamily="34" charset="-122"/>
                 <a:cs typeface="Red Hat Display" pitchFamily="34" charset="-120"/>
               </a:rPr>
-              <a:t>obs/kafka_propagation.py does by hand what the Java agent does automatically</a:t>
+              <a:t>Explicit Inject and Extract</a:t>
             </a:r>
             <a:endParaRPr lang="en-US" sz="3000" dirty="0"/>
           </a:p>

--- a/presentations/observability-otel-201-python.pptx
+++ b/presentations/observability-otel-201-python.pptx
@@ -17030,7 +17030,7 @@
                           <a:ea typeface="Red Hat Text" pitchFamily="34" charset="-122"/>
                           <a:cs typeface="Red Hat Text" pitchFamily="34" charset="-120"/>
                         </a:rPr>
-                        <a:t>histogram_quantile(0.99, ...) against orders_fulfillment_duration_ms_bucket, then click a diamond.</a:t>
+                        <a:t>histogram_quantile(0.99, ...) against http_server_duration_milliseconds_bucket, then click a diamond.</a:t>
                       </a:r>
                       <a:endParaRPr lang="en-US" sz="1300" dirty="0">
                         <a:latin typeface="Red Hat Text" charset="0"/>

--- a/presentations/observability-otel-201-python.pptx
+++ b/presentations/observability-otel-201-python.pptx
@@ -44,9 +44,10 @@
     <p:sldId id="292" r:id="rId38"/>
     <p:sldId id="293" r:id="rId39"/>
     <p:sldId id="294" r:id="rId40"/>
+    <p:sldId id="295" r:id="rId41"/>
   </p:sldIdLst>
   <p:notesMasterIdLst>
-    <p:notesMasterId r:id="rId41"/>
+    <p:notesMasterId r:id="rId42"/>
   </p:notesMasterIdLst>
   <p:sldSz cx="12192000" cy="6858000"/>
   <p:notesSz cx="6858000" cy="12192000"/>
@@ -3468,6 +3469,94 @@
             <a:fld id="{F7021451-1387-4CA6-816F-3879F97B5CBC}" type="slidenum">
               <a:rPr lang="en-US"/>
               <a:t>4</a:t>
+            </a:fld>
+            <a:endParaRPr lang="en-US"/>
+          </a:p>
+        </p:txBody>
+      </p:sp>
+    </p:spTree>
+    <p:extLst>
+      <p:ext uri="{BB962C8B-B14F-4D97-AF65-F5344CB8AC3E}">
+        <p14:creationId xmlns:p14="http://schemas.microsoft.com/office/powerpoint/2010/main" val="1024086991"/>
+      </p:ext>
+    </p:extLst>
+  </p:cSld>
+  <p:clrMapOvr>
+    <a:masterClrMapping/>
+  </p:clrMapOvr>
+</p:notes>
+</file>
+
+<file path=ppt/notesSlides/notesSlide40.xml><?xml version="1.0" encoding="utf-8"?>
+<p:notes xmlns:a="http://schemas.openxmlformats.org/drawingml/2006/main" xmlns:r="http://schemas.openxmlformats.org/officeDocument/2006/relationships" xmlns:p="http://schemas.openxmlformats.org/presentationml/2006/main">
+  <p:cSld>
+    <p:spTree>
+      <p:nvGrpSpPr>
+        <p:cNvPr id="1" name=""/>
+        <p:cNvGrpSpPr/>
+        <p:nvPr/>
+      </p:nvGrpSpPr>
+      <p:grpSpPr>
+        <a:xfrm>
+          <a:off x="0" y="0"/>
+          <a:ext cx="0" cy="0"/>
+          <a:chOff x="0" y="0"/>
+          <a:chExt cx="0" cy="0"/>
+        </a:xfrm>
+      </p:grpSpPr>
+      <p:sp>
+        <p:nvSpPr>
+          <p:cNvPr id="2" name="Slide Image Placeholder 1"/>
+          <p:cNvSpPr>
+            <a:spLocks noGrp="1" noRot="1" noChangeAspect="1"/>
+          </p:cNvSpPr>
+          <p:nvPr>
+            <p:ph type="sldImg"/>
+          </p:nvPr>
+        </p:nvSpPr>
+        <p:spPr/>
+      </p:sp>
+      <p:sp>
+        <p:nvSpPr>
+          <p:cNvPr id="3" name="Notes Placeholder 2"/>
+          <p:cNvSpPr>
+            <a:spLocks noGrp="1"/>
+          </p:cNvSpPr>
+          <p:nvPr>
+            <p:ph type="body" idx="1"/>
+          </p:nvPr>
+        </p:nvSpPr>
+        <p:spPr/>
+        <p:txBody>
+          <a:bodyPr/>
+          <a:lstStyle/>
+          <a:p>
+            <a:r>
+              <a:rPr lang="en-US" dirty="0"/>
+              <a:t>This is the Python implementation deck. The two codes take it with you: on the left, the site: the chapters, the runnable services, and the LGTM dashboards. On the right, the Workshops and Tutorials hub: every workshop, tutorial, and deck in the series in one place. Both are public on the Pattern Catalyst GitHub organization.</a:t>
+            </a:r>
+            <a:endParaRPr lang="en-US" dirty="0"/>
+          </a:p>
+        </p:txBody>
+      </p:sp>
+      <p:sp>
+        <p:nvSpPr>
+          <p:cNvPr id="4" name="Slide Number Placeholder 3"/>
+          <p:cNvSpPr>
+            <a:spLocks noGrp="1"/>
+          </p:cNvSpPr>
+          <p:nvPr>
+            <p:ph type="sldNum" sz="quarter" idx="10"/>
+          </p:nvPr>
+        </p:nvSpPr>
+        <p:spPr/>
+        <p:txBody>
+          <a:bodyPr/>
+          <a:lstStyle/>
+          <a:p>
+            <a:fld id="{F7021451-1387-4CA6-816F-3879F97B5CBC}" type="slidenum">
+              <a:rPr lang="en-US"/>
+              <a:t>40</a:t>
             </a:fld>
             <a:endParaRPr lang="en-US"/>
           </a:p>
@@ -17890,6 +17979,454 @@
 </p:sld>
 </file>
 
+<file path=ppt/slides/slide40.xml><?xml version="1.0" encoding="utf-8"?>
+<p:sld xmlns:a="http://schemas.openxmlformats.org/drawingml/2006/main" xmlns:r="http://schemas.openxmlformats.org/officeDocument/2006/relationships" xmlns:p="http://schemas.openxmlformats.org/presentationml/2006/main">
+  <p:cSld name="Slide 40">
+    <p:spTree>
+      <p:nvGrpSpPr>
+        <p:cNvPr id="1" name=""/>
+        <p:cNvGrpSpPr/>
+        <p:nvPr/>
+      </p:nvGrpSpPr>
+      <p:grpSpPr>
+        <a:xfrm>
+          <a:off x="0" y="0"/>
+          <a:ext cx="0" cy="0"/>
+          <a:chOff x="0" y="0"/>
+          <a:chExt cx="0" cy="0"/>
+        </a:xfrm>
+      </p:grpSpPr>
+      <p:sp>
+        <p:nvSpPr>
+          <p:cNvPr id="2" name="Text 0"/>
+          <p:cNvSpPr/>
+          <p:nvPr/>
+        </p:nvSpPr>
+        <p:spPr>
+          <a:xfrm>
+            <a:off x="566928" y="6364224"/>
+            <a:ext cx="914400" cy="274320"/>
+          </a:xfrm>
+          <a:prstGeom prst="rect">
+            <a:avLst/>
+          </a:prstGeom>
+          <a:noFill/>
+          <a:ln/>
+        </p:spPr>
+        <p:txBody>
+          <a:bodyPr wrap="square" rtlCol="0" anchor="ctr"/>
+          <a:lstStyle/>
+          <a:p>
+            <a:pPr algn="l" indent="0" marL="0">
+              <a:buNone/>
+            </a:pPr>
+            <a:r>
+              <a:rPr lang="en-US" sz="1000" dirty="0">
+                <a:solidFill>
+                  <a:srgbClr val="8A8A8A"/>
+                </a:solidFill>
+                <a:latin typeface="Red Hat Text" pitchFamily="34" charset="0"/>
+                <a:ea typeface="Red Hat Text" pitchFamily="34" charset="-122"/>
+                <a:cs typeface="Red Hat Text" pitchFamily="34" charset="-120"/>
+              </a:rPr>
+              <a:t>40</a:t>
+            </a:r>
+            <a:endParaRPr lang="en-US" sz="1000" dirty="0"/>
+          </a:p>
+        </p:txBody>
+      </p:sp>
+      <p:pic>
+        <p:nvPicPr>
+          <p:cNvPr id="3" name="Image 0" descr="./assets/logo-candidate-2.png">    </p:cNvPr>
+          <p:cNvPicPr>
+            <a:picLocks noChangeAspect="1"/>
+          </p:cNvPicPr>
+          <p:nvPr/>
+        </p:nvPicPr>
+        <p:blipFill>
+          <a:blip r:embed="rId1"/>
+          <a:stretch>
+            <a:fillRect/>
+          </a:stretch>
+        </p:blipFill>
+        <p:spPr>
+          <a:xfrm>
+            <a:off x="10561320" y="6355080"/>
+            <a:ext cx="1033272" cy="246888"/>
+          </a:xfrm>
+          <a:prstGeom prst="rect">
+            <a:avLst/>
+          </a:prstGeom>
+        </p:spPr>
+      </p:pic>
+      <p:sp>
+        <p:nvSpPr>
+          <p:cNvPr id="4" name="Text 1"/>
+          <p:cNvSpPr/>
+          <p:nvPr/>
+        </p:nvSpPr>
+        <p:spPr>
+          <a:xfrm>
+            <a:off x="566928" y="384048"/>
+            <a:ext cx="11055096" cy="292608"/>
+          </a:xfrm>
+          <a:prstGeom prst="rect">
+            <a:avLst/>
+          </a:prstGeom>
+          <a:noFill/>
+          <a:ln/>
+        </p:spPr>
+        <p:txBody>
+          <a:bodyPr wrap="square" rtlCol="0" anchor="ctr"/>
+          <a:lstStyle/>
+          <a:p>
+            <a:pPr algn="l" indent="0" marL="0">
+              <a:buNone/>
+            </a:pPr>
+            <a:r>
+              <a:rPr lang="en-US" sz="1200" b="1" spc="400" kern="0" dirty="0">
+                <a:solidFill>
+                  <a:srgbClr val="EE0000"/>
+                </a:solidFill>
+                <a:latin typeface="Red Hat Display" pitchFamily="34" charset="0"/>
+                <a:ea typeface="Red Hat Display" pitchFamily="34" charset="-122"/>
+                <a:cs typeface="Red Hat Display" pitchFamily="34" charset="-120"/>
+              </a:rPr>
+              <a:t>SCAN TO EXPLORE</a:t>
+            </a:r>
+            <a:endParaRPr lang="en-US" sz="1200" dirty="0"/>
+          </a:p>
+        </p:txBody>
+      </p:sp>
+      <p:sp>
+        <p:nvSpPr>
+          <p:cNvPr id="5" name="Text 2"/>
+          <p:cNvSpPr/>
+          <p:nvPr/>
+        </p:nvSpPr>
+        <p:spPr>
+          <a:xfrm>
+            <a:off x="566928" y="676656"/>
+            <a:ext cx="11055096" cy="1005840"/>
+          </a:xfrm>
+          <a:prstGeom prst="rect">
+            <a:avLst/>
+          </a:prstGeom>
+          <a:noFill/>
+          <a:ln/>
+        </p:spPr>
+        <p:txBody>
+          <a:bodyPr wrap="square" rtlCol="0" anchor="t"/>
+          <a:lstStyle/>
+          <a:p>
+            <a:pPr algn="l" indent="0" marL="0">
+              <a:buNone/>
+            </a:pPr>
+            <a:r>
+              <a:rPr lang="en-US" sz="3000" b="1" dirty="0">
+                <a:solidFill>
+                  <a:srgbClr val="151515"/>
+                </a:solidFill>
+                <a:latin typeface="Red Hat Display" pitchFamily="34" charset="0"/>
+                <a:ea typeface="Red Hat Display" pitchFamily="34" charset="-122"/>
+                <a:cs typeface="Red Hat Display" pitchFamily="34" charset="-120"/>
+              </a:rPr>
+              <a:t>Take it with you</a:t>
+            </a:r>
+            <a:endParaRPr lang="en-US" sz="3000" dirty="0"/>
+          </a:p>
+        </p:txBody>
+      </p:sp>
+      <p:pic>
+        <p:nvPicPr>
+          <p:cNvPr id="6" name="Image 1" descr="./assets/qr-otel-site.png">    </p:cNvPr>
+          <p:cNvPicPr>
+            <a:picLocks noChangeAspect="1"/>
+          </p:cNvPicPr>
+          <p:nvPr/>
+        </p:nvPicPr>
+        <p:blipFill>
+          <a:blip r:embed="rId2"/>
+          <a:stretch>
+            <a:fillRect/>
+          </a:stretch>
+        </p:blipFill>
+        <p:spPr>
+          <a:xfrm>
+            <a:off x="2103120" y="1627632"/>
+            <a:ext cx="2834640" cy="2834640"/>
+          </a:xfrm>
+          <a:prstGeom prst="rect">
+            <a:avLst/>
+          </a:prstGeom>
+        </p:spPr>
+      </p:pic>
+      <p:sp>
+        <p:nvSpPr>
+          <p:cNvPr id="7" name="Text 3"/>
+          <p:cNvSpPr/>
+          <p:nvPr/>
+        </p:nvSpPr>
+        <p:spPr>
+          <a:xfrm>
+            <a:off x="1417320" y="4553712"/>
+            <a:ext cx="4206240" cy="365760"/>
+          </a:xfrm>
+          <a:prstGeom prst="rect">
+            <a:avLst/>
+          </a:prstGeom>
+          <a:noFill/>
+          <a:ln/>
+        </p:spPr>
+        <p:txBody>
+          <a:bodyPr wrap="square" rtlCol="0" anchor="ctr"/>
+          <a:lstStyle/>
+          <a:p>
+            <a:pPr algn="ctr" indent="0" marL="0">
+              <a:buNone/>
+            </a:pPr>
+            <a:r>
+              <a:rPr lang="en-US" sz="1800" b="1" dirty="0">
+                <a:solidFill>
+                  <a:srgbClr val="151515"/>
+                </a:solidFill>
+                <a:latin typeface="Red Hat Display" pitchFamily="34" charset="0"/>
+                <a:ea typeface="Red Hat Display" pitchFamily="34" charset="-122"/>
+                <a:cs typeface="Red Hat Display" pitchFamily="34" charset="-120"/>
+              </a:rPr>
+              <a:t>The site</a:t>
+            </a:r>
+            <a:endParaRPr lang="en-US" sz="1800" dirty="0"/>
+          </a:p>
+        </p:txBody>
+      </p:sp>
+      <p:sp>
+        <p:nvSpPr>
+          <p:cNvPr id="8" name="Text 4"/>
+          <p:cNvSpPr/>
+          <p:nvPr/>
+        </p:nvSpPr>
+        <p:spPr>
+          <a:xfrm>
+            <a:off x="1325880" y="4937760"/>
+            <a:ext cx="4389120" cy="658368"/>
+          </a:xfrm>
+          <a:prstGeom prst="rect">
+            <a:avLst/>
+          </a:prstGeom>
+          <a:noFill/>
+          <a:ln/>
+        </p:spPr>
+        <p:txBody>
+          <a:bodyPr wrap="square" rtlCol="0" anchor="t"/>
+          <a:lstStyle/>
+          <a:p>
+            <a:pPr algn="ctr" indent="0" marL="0">
+              <a:buNone/>
+            </a:pPr>
+            <a:r>
+              <a:rPr lang="en-US" sz="1300" i="1" dirty="0">
+                <a:solidFill>
+                  <a:srgbClr val="5A5A5A"/>
+                </a:solidFill>
+                <a:latin typeface="Red Hat Text" pitchFamily="34" charset="0"/>
+                <a:ea typeface="Red Hat Text" pitchFamily="34" charset="-122"/>
+                <a:cs typeface="Red Hat Text" pitchFamily="34" charset="-120"/>
+              </a:rPr>
+              <a:t>Chapters, the runnable services, and the LGTM dashboards</a:t>
+            </a:r>
+            <a:endParaRPr lang="en-US" sz="1300" dirty="0"/>
+          </a:p>
+        </p:txBody>
+      </p:sp>
+      <p:sp>
+        <p:nvSpPr>
+          <p:cNvPr id="9" name="Text 5"/>
+          <p:cNvSpPr/>
+          <p:nvPr/>
+        </p:nvSpPr>
+        <p:spPr>
+          <a:xfrm>
+            <a:off x="1325880" y="5596128"/>
+            <a:ext cx="4389120" cy="292608"/>
+          </a:xfrm>
+          <a:prstGeom prst="rect">
+            <a:avLst/>
+          </a:prstGeom>
+          <a:noFill/>
+          <a:ln/>
+        </p:spPr>
+        <p:txBody>
+          <a:bodyPr wrap="square" rtlCol="0" anchor="ctr"/>
+          <a:lstStyle/>
+          <a:p>
+            <a:pPr algn="ctr" indent="0" marL="0">
+              <a:buNone/>
+            </a:pPr>
+            <a:r>
+              <a:rPr lang="en-US" sz="1000" dirty="0">
+                <a:solidFill>
+                  <a:srgbClr val="EE0000"/>
+                </a:solidFill>
+                <a:latin typeface="Red Hat Mono" pitchFamily="34" charset="0"/>
+                <a:ea typeface="Red Hat Mono" pitchFamily="34" charset="-122"/>
+                <a:cs typeface="Red Hat Mono" pitchFamily="34" charset="-120"/>
+              </a:rPr>
+              <a:t>patterncatalyst.github.io/otel-observability-tutorial</a:t>
+            </a:r>
+            <a:endParaRPr lang="en-US" sz="1000" dirty="0"/>
+          </a:p>
+        </p:txBody>
+      </p:sp>
+      <p:pic>
+        <p:nvPicPr>
+          <p:cNvPr id="10" name="Image 2" descr="./assets/qr-hub.png">    </p:cNvPr>
+          <p:cNvPicPr>
+            <a:picLocks noChangeAspect="1"/>
+          </p:cNvPicPr>
+          <p:nvPr/>
+        </p:nvPicPr>
+        <p:blipFill>
+          <a:blip r:embed="rId3"/>
+          <a:stretch>
+            <a:fillRect/>
+          </a:stretch>
+        </p:blipFill>
+        <p:spPr>
+          <a:xfrm>
+            <a:off x="7251192" y="1627632"/>
+            <a:ext cx="2834640" cy="2834640"/>
+          </a:xfrm>
+          <a:prstGeom prst="rect">
+            <a:avLst/>
+          </a:prstGeom>
+        </p:spPr>
+      </p:pic>
+      <p:sp>
+        <p:nvSpPr>
+          <p:cNvPr id="11" name="Text 6"/>
+          <p:cNvSpPr/>
+          <p:nvPr/>
+        </p:nvSpPr>
+        <p:spPr>
+          <a:xfrm>
+            <a:off x="6565392" y="4553712"/>
+            <a:ext cx="4206240" cy="365760"/>
+          </a:xfrm>
+          <a:prstGeom prst="rect">
+            <a:avLst/>
+          </a:prstGeom>
+          <a:noFill/>
+          <a:ln/>
+        </p:spPr>
+        <p:txBody>
+          <a:bodyPr wrap="square" rtlCol="0" anchor="ctr"/>
+          <a:lstStyle/>
+          <a:p>
+            <a:pPr algn="ctr" indent="0" marL="0">
+              <a:buNone/>
+            </a:pPr>
+            <a:r>
+              <a:rPr lang="en-US" sz="1800" b="1" dirty="0">
+                <a:solidFill>
+                  <a:srgbClr val="151515"/>
+                </a:solidFill>
+                <a:latin typeface="Red Hat Display" pitchFamily="34" charset="0"/>
+                <a:ea typeface="Red Hat Display" pitchFamily="34" charset="-122"/>
+                <a:cs typeface="Red Hat Display" pitchFamily="34" charset="-120"/>
+              </a:rPr>
+              <a:t>Workshops &amp; Tutorials</a:t>
+            </a:r>
+            <a:endParaRPr lang="en-US" sz="1800" dirty="0"/>
+          </a:p>
+        </p:txBody>
+      </p:sp>
+      <p:sp>
+        <p:nvSpPr>
+          <p:cNvPr id="12" name="Text 7"/>
+          <p:cNvSpPr/>
+          <p:nvPr/>
+        </p:nvSpPr>
+        <p:spPr>
+          <a:xfrm>
+            <a:off x="6473952" y="4937760"/>
+            <a:ext cx="4389120" cy="658368"/>
+          </a:xfrm>
+          <a:prstGeom prst="rect">
+            <a:avLst/>
+          </a:prstGeom>
+          <a:noFill/>
+          <a:ln/>
+        </p:spPr>
+        <p:txBody>
+          <a:bodyPr wrap="square" rtlCol="0" anchor="t"/>
+          <a:lstStyle/>
+          <a:p>
+            <a:pPr algn="ctr" indent="0" marL="0">
+              <a:buNone/>
+            </a:pPr>
+            <a:r>
+              <a:rPr lang="en-US" sz="1300" i="1" dirty="0">
+                <a:solidFill>
+                  <a:srgbClr val="5A5A5A"/>
+                </a:solidFill>
+                <a:latin typeface="Red Hat Text" pitchFamily="34" charset="0"/>
+                <a:ea typeface="Red Hat Text" pitchFamily="34" charset="-122"/>
+                <a:cs typeface="Red Hat Text" pitchFamily="34" charset="-120"/>
+              </a:rPr>
+              <a:t>The whole series: every workshop, tutorial, and deck in one place</a:t>
+            </a:r>
+            <a:endParaRPr lang="en-US" sz="1300" dirty="0"/>
+          </a:p>
+        </p:txBody>
+      </p:sp>
+      <p:sp>
+        <p:nvSpPr>
+          <p:cNvPr id="13" name="Text 8"/>
+          <p:cNvSpPr/>
+          <p:nvPr/>
+        </p:nvSpPr>
+        <p:spPr>
+          <a:xfrm>
+            <a:off x="6473952" y="5596128"/>
+            <a:ext cx="4389120" cy="292608"/>
+          </a:xfrm>
+          <a:prstGeom prst="rect">
+            <a:avLst/>
+          </a:prstGeom>
+          <a:noFill/>
+          <a:ln/>
+        </p:spPr>
+        <p:txBody>
+          <a:bodyPr wrap="square" rtlCol="0" anchor="ctr"/>
+          <a:lstStyle/>
+          <a:p>
+            <a:pPr algn="ctr" indent="0" marL="0">
+              <a:buNone/>
+            </a:pPr>
+            <a:r>
+              <a:rPr lang="en-US" sz="900" dirty="0">
+                <a:solidFill>
+                  <a:srgbClr val="EE0000"/>
+                </a:solidFill>
+                <a:latin typeface="Red Hat Mono" pitchFamily="34" charset="0"/>
+                <a:ea typeface="Red Hat Mono" pitchFamily="34" charset="-122"/>
+                <a:cs typeface="Red Hat Mono" pitchFamily="34" charset="-120"/>
+              </a:rPr>
+              <a:t>patterncatalyst.github.io/patterncatalyst-workshops-tutorials-list</a:t>
+            </a:r>
+            <a:endParaRPr lang="en-US" sz="900" dirty="0"/>
+          </a:p>
+        </p:txBody>
+      </p:sp>
+    </p:spTree>
+  </p:cSld>
+  <p:clrMapOvr>
+    <a:masterClrMapping/>
+  </p:clrMapOvr>
+</p:sld>
+</file>
+
 <file path=ppt/slides/slide5.xml><?xml version="1.0" encoding="utf-8"?>
 <p:sld xmlns:a="http://schemas.openxmlformats.org/drawingml/2006/main" xmlns:r="http://schemas.openxmlformats.org/officeDocument/2006/relationships" xmlns:p="http://schemas.openxmlformats.org/presentationml/2006/main">
   <p:cSld name="Slide 5">
